--- a/figs/old/DAG.pptx
+++ b/figs/old/DAG.pptx
@@ -10460,7 +10460,7 @@
         <p:spPr>
           <a:xfrm>
             <a:off x="351346" y="3439671"/>
-            <a:ext cx="2401235" cy="584775"/>
+            <a:ext cx="10121297" cy="584775"/>
           </a:xfrm>
           <a:prstGeom prst="rect">
             <a:avLst/>
@@ -10475,7 +10475,7 @@
           <a:p>
             <a:r>
               <a:rPr lang="en-US" sz="3200" b="1" dirty="0"/>
-              <a:t>	  DAG 2</a:t>
+              <a:t>	  DAG 2           						       DAG 3</a:t>
             </a:r>
             <a:endParaRPr lang="en-US" sz="3200" dirty="0"/>
           </a:p>
@@ -10828,6 +10828,431 @@
           <a:xfrm flipV="1">
             <a:off x="1794869" y="5728177"/>
             <a:ext cx="684808" cy="319211"/>
+          </a:xfrm>
+          <a:prstGeom prst="straightConnector1">
+            <a:avLst/>
+          </a:prstGeom>
+          <a:ln w="50800">
+            <a:solidFill>
+              <a:schemeClr val="tx1"/>
+            </a:solidFill>
+            <a:tailEnd type="triangle"/>
+          </a:ln>
+        </p:spPr>
+        <p:style>
+          <a:lnRef idx="2">
+            <a:schemeClr val="accent1"/>
+          </a:lnRef>
+          <a:fillRef idx="0">
+            <a:schemeClr val="accent1"/>
+          </a:fillRef>
+          <a:effectRef idx="1">
+            <a:schemeClr val="accent1"/>
+          </a:effectRef>
+          <a:fontRef idx="minor">
+            <a:schemeClr val="tx1"/>
+          </a:fontRef>
+        </p:style>
+      </p:cxnSp>
+      <p:sp>
+        <p:nvSpPr>
+          <p:cNvPr id="50" name="Rectangle 49">
+            <a:extLst>
+              <a:ext uri="{FF2B5EF4-FFF2-40B4-BE49-F238E27FC236}">
+                <a16:creationId xmlns:a16="http://schemas.microsoft.com/office/drawing/2014/main" id="{63631D04-855D-21A9-492A-E65F73EAEB1A}"/>
+              </a:ext>
+            </a:extLst>
+          </p:cNvPr>
+          <p:cNvSpPr/>
+          <p:nvPr/>
+        </p:nvSpPr>
+        <p:spPr>
+          <a:xfrm>
+            <a:off x="7637721" y="3987343"/>
+            <a:ext cx="4329307" cy="2658139"/>
+          </a:xfrm>
+          <a:prstGeom prst="rect">
+            <a:avLst/>
+          </a:prstGeom>
+          <a:noFill/>
+          <a:ln>
+            <a:solidFill>
+              <a:schemeClr val="tx1"/>
+            </a:solidFill>
+          </a:ln>
+        </p:spPr>
+        <p:style>
+          <a:lnRef idx="2">
+            <a:schemeClr val="accent1">
+              <a:shade val="15000"/>
+            </a:schemeClr>
+          </a:lnRef>
+          <a:fillRef idx="1">
+            <a:schemeClr val="accent1"/>
+          </a:fillRef>
+          <a:effectRef idx="0">
+            <a:schemeClr val="accent1"/>
+          </a:effectRef>
+          <a:fontRef idx="minor">
+            <a:schemeClr val="lt1"/>
+          </a:fontRef>
+        </p:style>
+        <p:txBody>
+          <a:bodyPr rtlCol="0" anchor="ctr"/>
+          <a:lstStyle/>
+          <a:p>
+            <a:pPr algn="ctr"/>
+            <a:endParaRPr lang="en-US"/>
+          </a:p>
+        </p:txBody>
+      </p:sp>
+      <p:sp>
+        <p:nvSpPr>
+          <p:cNvPr id="51" name="Oval 50">
+            <a:extLst>
+              <a:ext uri="{FF2B5EF4-FFF2-40B4-BE49-F238E27FC236}">
+                <a16:creationId xmlns:a16="http://schemas.microsoft.com/office/drawing/2014/main" id="{20050AF5-CCB9-9163-813C-D628129690DB}"/>
+              </a:ext>
+            </a:extLst>
+          </p:cNvPr>
+          <p:cNvSpPr/>
+          <p:nvPr/>
+        </p:nvSpPr>
+        <p:spPr>
+          <a:xfrm>
+            <a:off x="7742168" y="4752125"/>
+            <a:ext cx="786809" cy="797442"/>
+          </a:xfrm>
+          <a:prstGeom prst="ellipse">
+            <a:avLst/>
+          </a:prstGeom>
+          <a:solidFill>
+            <a:schemeClr val="accent1">
+              <a:alpha val="30454"/>
+            </a:schemeClr>
+          </a:solidFill>
+          <a:ln>
+            <a:solidFill>
+              <a:schemeClr val="bg1"/>
+            </a:solidFill>
+          </a:ln>
+        </p:spPr>
+        <p:style>
+          <a:lnRef idx="2">
+            <a:schemeClr val="accent1">
+              <a:shade val="15000"/>
+            </a:schemeClr>
+          </a:lnRef>
+          <a:fillRef idx="1">
+            <a:schemeClr val="accent1"/>
+          </a:fillRef>
+          <a:effectRef idx="0">
+            <a:schemeClr val="accent1"/>
+          </a:effectRef>
+          <a:fontRef idx="minor">
+            <a:schemeClr val="lt1"/>
+          </a:fontRef>
+        </p:style>
+        <p:txBody>
+          <a:bodyPr rtlCol="0" anchor="ctr"/>
+          <a:lstStyle/>
+          <a:p>
+            <a:pPr algn="ctr"/>
+            <a:endParaRPr lang="en-US"/>
+          </a:p>
+        </p:txBody>
+      </p:sp>
+      <p:sp>
+        <p:nvSpPr>
+          <p:cNvPr id="52" name="TextBox 51">
+            <a:extLst>
+              <a:ext uri="{FF2B5EF4-FFF2-40B4-BE49-F238E27FC236}">
+                <a16:creationId xmlns:a16="http://schemas.microsoft.com/office/drawing/2014/main" id="{47E0DBB5-0A42-6DB5-5D13-938679A2C5B2}"/>
+              </a:ext>
+            </a:extLst>
+          </p:cNvPr>
+          <p:cNvSpPr txBox="1"/>
+          <p:nvPr/>
+        </p:nvSpPr>
+        <p:spPr>
+          <a:xfrm>
+            <a:off x="8052258" y="4917057"/>
+            <a:ext cx="199606" cy="387798"/>
+          </a:xfrm>
+          <a:prstGeom prst="rect">
+            <a:avLst/>
+          </a:prstGeom>
+          <a:solidFill>
+            <a:schemeClr val="bg1">
+              <a:alpha val="63363"/>
+            </a:schemeClr>
+          </a:solidFill>
+        </p:spPr>
+        <p:txBody>
+          <a:bodyPr wrap="none" lIns="9144" tIns="9144" rIns="9144" bIns="9144" rtlCol="0">
+            <a:spAutoFit/>
+          </a:bodyPr>
+          <a:lstStyle/>
+          <a:p>
+            <a:r>
+              <a:rPr lang="en-US" sz="2400" dirty="0"/>
+              <a:t>A</a:t>
+            </a:r>
+          </a:p>
+        </p:txBody>
+      </p:sp>
+      <p:sp>
+        <p:nvSpPr>
+          <p:cNvPr id="53" name="Oval 52">
+            <a:extLst>
+              <a:ext uri="{FF2B5EF4-FFF2-40B4-BE49-F238E27FC236}">
+                <a16:creationId xmlns:a16="http://schemas.microsoft.com/office/drawing/2014/main" id="{1CCC10D3-3824-E56A-8C08-9796895C419E}"/>
+              </a:ext>
+            </a:extLst>
+          </p:cNvPr>
+          <p:cNvSpPr/>
+          <p:nvPr/>
+        </p:nvSpPr>
+        <p:spPr>
+          <a:xfrm>
+            <a:off x="9401349" y="4752125"/>
+            <a:ext cx="786809" cy="797442"/>
+          </a:xfrm>
+          <a:prstGeom prst="ellipse">
+            <a:avLst/>
+          </a:prstGeom>
+          <a:solidFill>
+            <a:schemeClr val="accent1">
+              <a:alpha val="30454"/>
+            </a:schemeClr>
+          </a:solidFill>
+          <a:ln>
+            <a:solidFill>
+              <a:schemeClr val="bg1"/>
+            </a:solidFill>
+          </a:ln>
+        </p:spPr>
+        <p:style>
+          <a:lnRef idx="2">
+            <a:schemeClr val="accent1">
+              <a:shade val="15000"/>
+            </a:schemeClr>
+          </a:lnRef>
+          <a:fillRef idx="1">
+            <a:schemeClr val="accent1"/>
+          </a:fillRef>
+          <a:effectRef idx="0">
+            <a:schemeClr val="accent1"/>
+          </a:effectRef>
+          <a:fontRef idx="minor">
+            <a:schemeClr val="lt1"/>
+          </a:fontRef>
+        </p:style>
+        <p:txBody>
+          <a:bodyPr rtlCol="0" anchor="ctr"/>
+          <a:lstStyle/>
+          <a:p>
+            <a:pPr algn="ctr"/>
+            <a:endParaRPr lang="en-US"/>
+          </a:p>
+        </p:txBody>
+      </p:sp>
+      <p:sp>
+        <p:nvSpPr>
+          <p:cNvPr id="54" name="TextBox 53">
+            <a:extLst>
+              <a:ext uri="{FF2B5EF4-FFF2-40B4-BE49-F238E27FC236}">
+                <a16:creationId xmlns:a16="http://schemas.microsoft.com/office/drawing/2014/main" id="{DCF44EC8-2AC7-C76E-91C5-DD22558D5ECC}"/>
+              </a:ext>
+            </a:extLst>
+          </p:cNvPr>
+          <p:cNvSpPr txBox="1"/>
+          <p:nvPr/>
+        </p:nvSpPr>
+        <p:spPr>
+          <a:xfrm>
+            <a:off x="9676058" y="4918323"/>
+            <a:ext cx="204415" cy="387798"/>
+          </a:xfrm>
+          <a:prstGeom prst="rect">
+            <a:avLst/>
+          </a:prstGeom>
+          <a:solidFill>
+            <a:schemeClr val="bg1">
+              <a:alpha val="63363"/>
+            </a:schemeClr>
+          </a:solidFill>
+        </p:spPr>
+        <p:txBody>
+          <a:bodyPr wrap="none" lIns="9144" tIns="9144" rIns="9144" bIns="9144" rtlCol="0">
+            <a:spAutoFit/>
+          </a:bodyPr>
+          <a:lstStyle/>
+          <a:p>
+            <a:r>
+              <a:rPr lang="en-US" sz="2400" dirty="0"/>
+              <a:t>B</a:t>
+            </a:r>
+          </a:p>
+        </p:txBody>
+      </p:sp>
+      <p:sp>
+        <p:nvSpPr>
+          <p:cNvPr id="55" name="Oval 54">
+            <a:extLst>
+              <a:ext uri="{FF2B5EF4-FFF2-40B4-BE49-F238E27FC236}">
+                <a16:creationId xmlns:a16="http://schemas.microsoft.com/office/drawing/2014/main" id="{5A3E00CC-9EF5-0139-0E5E-60197B576492}"/>
+              </a:ext>
+            </a:extLst>
+          </p:cNvPr>
+          <p:cNvSpPr/>
+          <p:nvPr/>
+        </p:nvSpPr>
+        <p:spPr>
+          <a:xfrm>
+            <a:off x="11027554" y="4763391"/>
+            <a:ext cx="786809" cy="797442"/>
+          </a:xfrm>
+          <a:prstGeom prst="ellipse">
+            <a:avLst/>
+          </a:prstGeom>
+          <a:solidFill>
+            <a:srgbClr val="FF0000">
+              <a:alpha val="30454"/>
+            </a:srgbClr>
+          </a:solidFill>
+          <a:ln>
+            <a:solidFill>
+              <a:schemeClr val="bg1"/>
+            </a:solidFill>
+          </a:ln>
+        </p:spPr>
+        <p:style>
+          <a:lnRef idx="2">
+            <a:schemeClr val="accent1">
+              <a:shade val="15000"/>
+            </a:schemeClr>
+          </a:lnRef>
+          <a:fillRef idx="1">
+            <a:schemeClr val="accent1"/>
+          </a:fillRef>
+          <a:effectRef idx="0">
+            <a:schemeClr val="accent1"/>
+          </a:effectRef>
+          <a:fontRef idx="minor">
+            <a:schemeClr val="lt1"/>
+          </a:fontRef>
+        </p:style>
+        <p:txBody>
+          <a:bodyPr rtlCol="0" anchor="ctr"/>
+          <a:lstStyle/>
+          <a:p>
+            <a:pPr algn="ctr"/>
+            <a:endParaRPr lang="en-US"/>
+          </a:p>
+        </p:txBody>
+      </p:sp>
+      <p:sp>
+        <p:nvSpPr>
+          <p:cNvPr id="56" name="TextBox 55">
+            <a:extLst>
+              <a:ext uri="{FF2B5EF4-FFF2-40B4-BE49-F238E27FC236}">
+                <a16:creationId xmlns:a16="http://schemas.microsoft.com/office/drawing/2014/main" id="{929B4C7A-1DD0-CE61-7A32-A271535B6A9B}"/>
+              </a:ext>
+            </a:extLst>
+          </p:cNvPr>
+          <p:cNvSpPr txBox="1"/>
+          <p:nvPr/>
+        </p:nvSpPr>
+        <p:spPr>
+          <a:xfrm>
+            <a:off x="11302795" y="4917057"/>
+            <a:ext cx="231666" cy="387798"/>
+          </a:xfrm>
+          <a:prstGeom prst="rect">
+            <a:avLst/>
+          </a:prstGeom>
+          <a:solidFill>
+            <a:schemeClr val="bg1">
+              <a:alpha val="63363"/>
+            </a:schemeClr>
+          </a:solidFill>
+        </p:spPr>
+        <p:txBody>
+          <a:bodyPr wrap="none" lIns="9144" tIns="9144" rIns="9144" bIns="9144" rtlCol="0">
+            <a:spAutoFit/>
+          </a:bodyPr>
+          <a:lstStyle/>
+          <a:p>
+            <a:r>
+              <a:rPr lang="en-US" sz="2400" dirty="0"/>
+              <a:t>C</a:t>
+            </a:r>
+          </a:p>
+        </p:txBody>
+      </p:sp>
+      <p:cxnSp>
+        <p:nvCxnSpPr>
+          <p:cNvPr id="57" name="Straight Arrow Connector 56">
+            <a:extLst>
+              <a:ext uri="{FF2B5EF4-FFF2-40B4-BE49-F238E27FC236}">
+                <a16:creationId xmlns:a16="http://schemas.microsoft.com/office/drawing/2014/main" id="{CB5EF774-49B3-5417-8EDA-4E454C25390A}"/>
+              </a:ext>
+            </a:extLst>
+          </p:cNvPr>
+          <p:cNvCxnSpPr>
+            <a:cxnSpLocks/>
+          </p:cNvCxnSpPr>
+          <p:nvPr/>
+        </p:nvCxnSpPr>
+        <p:spPr>
+          <a:xfrm>
+            <a:off x="8620416" y="5162112"/>
+            <a:ext cx="626060" cy="0"/>
+          </a:xfrm>
+          <a:prstGeom prst="straightConnector1">
+            <a:avLst/>
+          </a:prstGeom>
+          <a:ln w="50800">
+            <a:solidFill>
+              <a:schemeClr val="tx1"/>
+            </a:solidFill>
+            <a:tailEnd type="triangle"/>
+          </a:ln>
+        </p:spPr>
+        <p:style>
+          <a:lnRef idx="2">
+            <a:schemeClr val="accent1"/>
+          </a:lnRef>
+          <a:fillRef idx="0">
+            <a:schemeClr val="accent1"/>
+          </a:fillRef>
+          <a:effectRef idx="1">
+            <a:schemeClr val="accent1"/>
+          </a:effectRef>
+          <a:fontRef idx="minor">
+            <a:schemeClr val="tx1"/>
+          </a:fontRef>
+        </p:style>
+      </p:cxnSp>
+      <p:cxnSp>
+        <p:nvCxnSpPr>
+          <p:cNvPr id="58" name="Straight Arrow Connector 57">
+            <a:extLst>
+              <a:ext uri="{FF2B5EF4-FFF2-40B4-BE49-F238E27FC236}">
+                <a16:creationId xmlns:a16="http://schemas.microsoft.com/office/drawing/2014/main" id="{49005198-86DA-D9CE-42CA-F4215C1B7C89}"/>
+              </a:ext>
+            </a:extLst>
+          </p:cNvPr>
+          <p:cNvCxnSpPr>
+            <a:cxnSpLocks/>
+          </p:cNvCxnSpPr>
+          <p:nvPr/>
+        </p:nvCxnSpPr>
+        <p:spPr>
+          <a:xfrm>
+            <a:off x="10380532" y="5162112"/>
+            <a:ext cx="513311" cy="0"/>
           </a:xfrm>
           <a:prstGeom prst="straightConnector1">
             <a:avLst/>
